--- a/generated/Tier 1 Broker Scorecards/Convoy Trucking Insurance Agency, Inc_Broker_Scorecard.pptx
+++ b/generated/Tier 1 Broker Scorecards/Convoy Trucking Insurance Agency, Inc_Broker_Scorecard.pptx
@@ -3394,7 +3394,7 @@
                         <a:rPr sz="900">
                           <a:latin typeface="Segoe UI"/>
                         </a:rPr>
-                        <a:t>Tier 1  |  5.92% / 15.00%</a:t>
+                        <a:t>Tier 1  |  5.88% / 15.00%</a:t>
                       </a:r>
                     </a:p>
                   </a:txBody>
@@ -3766,7 +3766,7 @@
                         <a:rPr sz="900">
                           <a:latin typeface="Segoe UI"/>
                         </a:rPr>
-                        <a:t>Non-Fleet Subs: 154  |  Binds: 9</a:t>
+                        <a:t>Non-Fleet Subs: 155  |  Binds: 9</a:t>
                       </a:r>
                     </a:p>
                   </a:txBody>
@@ -4428,7 +4428,7 @@
                           </a:solidFill>
                           <a:latin typeface="Segoe UI"/>
                         </a:rPr>
-                        <a:t>23</a:t>
+                        <a:t>24</a:t>
                       </a:r>
                     </a:p>
                   </a:txBody>
@@ -4664,7 +4664,7 @@
                         <a:rPr sz="800">
                           <a:latin typeface="Segoe UI"/>
                         </a:rPr>
-                        <a:t>33.3%</a:t>
+                        <a:t>29.6%</a:t>
                       </a:r>
                     </a:p>
                   </a:txBody>
@@ -4707,7 +4707,7 @@
                           </a:solidFill>
                           <a:latin typeface="Segoe UI"/>
                         </a:rPr>
-                        <a:t>4.3%</a:t>
+                        <a:t>4.2%</a:t>
                       </a:r>
                     </a:p>
                   </a:txBody>
@@ -4943,7 +4943,7 @@
                         <a:rPr sz="800">
                           <a:latin typeface="Segoe UI"/>
                         </a:rPr>
-                        <a:t>9</a:t>
+                        <a:t>8</a:t>
                       </a:r>
                     </a:p>
                   </a:txBody>

--- a/generated/Tier 1 Broker Scorecards/Convoy Trucking Insurance Agency, Inc_Broker_Scorecard.pptx
+++ b/generated/Tier 1 Broker Scorecards/Convoy Trucking Insurance Agency, Inc_Broker_Scorecard.pptx
@@ -3394,7 +3394,7 @@
                         <a:rPr sz="900">
                           <a:latin typeface="Segoe UI"/>
                         </a:rPr>
-                        <a:t>Tier 1  |  5.88% / 15.00%</a:t>
+                        <a:t>Tier 1  |  5.75% / 15.00%</a:t>
                       </a:r>
                     </a:p>
                   </a:txBody>
@@ -3690,7 +3690,7 @@
                         <a:rPr sz="900">
                           <a:latin typeface="Segoe UI"/>
                         </a:rPr>
-                        <a:t>Fleet Bound Premium: $94,318.73</a:t>
+                        <a:t>Fleet Bound Premium: $102,439.35</a:t>
                       </a:r>
                     </a:p>
                   </a:txBody>
@@ -3727,7 +3727,7 @@
                         <a:rPr sz="900">
                           <a:latin typeface="Segoe UI"/>
                         </a:rPr>
-                        <a:t>Fleet Book %: 28.8%</a:t>
+                        <a:t>Fleet Book %: 31.3%</a:t>
                       </a:r>
                     </a:p>
                   </a:txBody>
@@ -3766,7 +3766,7 @@
                         <a:rPr sz="900">
                           <a:latin typeface="Segoe UI"/>
                         </a:rPr>
-                        <a:t>Non-Fleet Subs: 155  |  Binds: 9</a:t>
+                        <a:t>Non-Fleet Subs: 159  |  Binds: 9</a:t>
                       </a:r>
                     </a:p>
                   </a:txBody>
@@ -3803,7 +3803,7 @@
                         <a:rPr sz="900">
                           <a:latin typeface="Segoe UI"/>
                         </a:rPr>
-                        <a:t>Non-Fleet Bound Premium: $232,732.67</a:t>
+                        <a:t>Non-Fleet Bound Premium: $224,612.05</a:t>
                       </a:r>
                     </a:p>
                   </a:txBody>
@@ -3840,7 +3840,7 @@
                         <a:rPr sz="900">
                           <a:latin typeface="Segoe UI"/>
                         </a:rPr>
-                        <a:t>Non-Fleet Book %: 71.2%</a:t>
+                        <a:t>Non-Fleet Book %: 68.7%</a:t>
                       </a:r>
                     </a:p>
                   </a:txBody>
@@ -4424,11 +4424,11 @@
                       <a:r>
                         <a:rPr sz="800">
                           <a:solidFill>
-                            <a:srgbClr val="DC2626"/>
+                            <a:srgbClr val="059669"/>
                           </a:solidFill>
                           <a:latin typeface="Segoe UI"/>
                         </a:rPr>
-                        <a:t>24</a:t>
+                        <a:t>29</a:t>
                       </a:r>
                     </a:p>
                   </a:txBody>
@@ -4664,7 +4664,7 @@
                         <a:rPr sz="800">
                           <a:latin typeface="Segoe UI"/>
                         </a:rPr>
-                        <a:t>29.6%</a:t>
+                        <a:t>33.3%</a:t>
                       </a:r>
                     </a:p>
                   </a:txBody>
@@ -4707,7 +4707,7 @@
                           </a:solidFill>
                           <a:latin typeface="Segoe UI"/>
                         </a:rPr>
-                        <a:t>4.2%</a:t>
+                        <a:t>3.4%</a:t>
                       </a:r>
                     </a:p>
                   </a:txBody>
@@ -4943,7 +4943,7 @@
                         <a:rPr sz="800">
                           <a:latin typeface="Segoe UI"/>
                         </a:rPr>
-                        <a:t>8</a:t>
+                        <a:t>9</a:t>
                       </a:r>
                     </a:p>
                   </a:txBody>

--- a/generated/Tier 1 Broker Scorecards/Convoy Trucking Insurance Agency, Inc_Broker_Scorecard.pptx
+++ b/generated/Tier 1 Broker Scorecards/Convoy Trucking Insurance Agency, Inc_Broker_Scorecard.pptx
@@ -3357,7 +3357,7 @@
                         <a:rPr sz="800">
                           <a:latin typeface="Segoe UI"/>
                         </a:rPr>
-                        <a:t>$713,272.16 / $861,548.47 / $327,051.40</a:t>
+                        <a:t>$713,272.16 / $876,147.47 / $341,650.40</a:t>
                       </a:r>
                     </a:p>
                   </a:txBody>
@@ -3394,7 +3394,7 @@
                         <a:rPr sz="900">
                           <a:latin typeface="Segoe UI"/>
                         </a:rPr>
-                        <a:t>Tier 1  |  5.75% / 15.00%</a:t>
+                        <a:t>Tier 1  |  5.65% / 15.00%</a:t>
                       </a:r>
                     </a:p>
                   </a:txBody>
@@ -3431,7 +3431,7 @@
                         <a:rPr sz="900">
                           <a:latin typeface="Segoe UI"/>
                         </a:rPr>
-                        <a:t>$998,581.02  (32.8% achieved)</a:t>
+                        <a:t>$998,581.02  (34.2% achieved)</a:t>
                       </a:r>
                     </a:p>
                   </a:txBody>
@@ -3690,7 +3690,7 @@
                         <a:rPr sz="900">
                           <a:latin typeface="Segoe UI"/>
                         </a:rPr>
-                        <a:t>Fleet Bound Premium: $102,439.35</a:t>
+                        <a:t>Fleet Bound Premium: $107,012.06</a:t>
                       </a:r>
                     </a:p>
                   </a:txBody>
@@ -3766,7 +3766,7 @@
                         <a:rPr sz="900">
                           <a:latin typeface="Segoe UI"/>
                         </a:rPr>
-                        <a:t>Non-Fleet Subs: 159  |  Binds: 9</a:t>
+                        <a:t>Non-Fleet Subs: 162  |  Binds: 9</a:t>
                       </a:r>
                     </a:p>
                   </a:txBody>
@@ -3803,7 +3803,7 @@
                         <a:rPr sz="900">
                           <a:latin typeface="Segoe UI"/>
                         </a:rPr>
-                        <a:t>Non-Fleet Bound Premium: $224,612.05</a:t>
+                        <a:t>Non-Fleet Bound Premium: $234,638.34</a:t>
                       </a:r>
                     </a:p>
                   </a:txBody>
@@ -4428,7 +4428,7 @@
                           </a:solidFill>
                           <a:latin typeface="Segoe UI"/>
                         </a:rPr>
-                        <a:t>29</a:t>
+                        <a:t>32</a:t>
                       </a:r>
                     </a:p>
                   </a:txBody>
@@ -4664,7 +4664,7 @@
                         <a:rPr sz="800">
                           <a:latin typeface="Segoe UI"/>
                         </a:rPr>
-                        <a:t>33.3%</a:t>
+                        <a:t>29.6%</a:t>
                       </a:r>
                     </a:p>
                   </a:txBody>
@@ -4707,7 +4707,7 @@
                           </a:solidFill>
                           <a:latin typeface="Segoe UI"/>
                         </a:rPr>
-                        <a:t>3.4%</a:t>
+                        <a:t>3.1%</a:t>
                       </a:r>
                     </a:p>
                   </a:txBody>
@@ -4943,7 +4943,7 @@
                         <a:rPr sz="800">
                           <a:latin typeface="Segoe UI"/>
                         </a:rPr>
-                        <a:t>9</a:t>
+                        <a:t>8</a:t>
                       </a:r>
                     </a:p>
                   </a:txBody>
@@ -5259,7 +5259,7 @@
                           </a:solidFill>
                           <a:latin typeface="Segoe UI"/>
                         </a:rPr>
-                        <a:t>$18.1K</a:t>
+                        <a:t>$32.7K</a:t>
                       </a:r>
                     </a:p>
                   </a:txBody>

--- a/generated/Tier 1 Broker Scorecards/Convoy Trucking Insurance Agency, Inc_Broker_Scorecard.pptx
+++ b/generated/Tier 1 Broker Scorecards/Convoy Trucking Insurance Agency, Inc_Broker_Scorecard.pptx
@@ -4664,7 +4664,7 @@
                         <a:rPr sz="800">
                           <a:latin typeface="Segoe UI"/>
                         </a:rPr>
-                        <a:t>29.6%</a:t>
+                        <a:t>33.3%</a:t>
                       </a:r>
                     </a:p>
                   </a:txBody>
@@ -4943,7 +4943,7 @@
                         <a:rPr sz="800">
                           <a:latin typeface="Segoe UI"/>
                         </a:rPr>
-                        <a:t>8</a:t>
+                        <a:t>9</a:t>
                       </a:r>
                     </a:p>
                   </a:txBody>

--- a/generated/Tier 1 Broker Scorecards/Convoy Trucking Insurance Agency, Inc_Broker_Scorecard.pptx
+++ b/generated/Tier 1 Broker Scorecards/Convoy Trucking Insurance Agency, Inc_Broker_Scorecard.pptx
@@ -3357,7 +3357,7 @@
                         <a:rPr sz="800">
                           <a:latin typeface="Segoe UI"/>
                         </a:rPr>
-                        <a:t>$713,272.16 / $876,147.47 / $341,650.40</a:t>
+                        <a:t>$713,272.16 / $896,597.16 / $362,100.09</a:t>
                       </a:r>
                     </a:p>
                   </a:txBody>
@@ -3394,7 +3394,7 @@
                         <a:rPr sz="900">
                           <a:latin typeface="Segoe UI"/>
                         </a:rPr>
-                        <a:t>Tier 1  |  5.65% / 15.00%</a:t>
+                        <a:t>Tier 1  |  6.15% / 15.00%</a:t>
                       </a:r>
                     </a:p>
                   </a:txBody>
@@ -3431,7 +3431,7 @@
                         <a:rPr sz="900">
                           <a:latin typeface="Segoe UI"/>
                         </a:rPr>
-                        <a:t>$998,581.02  (34.2% achieved)</a:t>
+                        <a:t>$998,581.02  (36.3% achieved)</a:t>
                       </a:r>
                     </a:p>
                   </a:txBody>
@@ -3653,7 +3653,7 @@
                         <a:rPr sz="900">
                           <a:latin typeface="Segoe UI"/>
                         </a:rPr>
-                        <a:t>Fleet Subs: 15  |  Binds: 1</a:t>
+                        <a:t>Fleet Subs: 16  |  Binds: 1</a:t>
                       </a:r>
                     </a:p>
                   </a:txBody>
@@ -3690,7 +3690,7 @@
                         <a:rPr sz="900">
                           <a:latin typeface="Segoe UI"/>
                         </a:rPr>
-                        <a:t>Fleet Bound Premium: $107,012.06</a:t>
+                        <a:t>Fleet Bound Premium: $105,952.99</a:t>
                       </a:r>
                     </a:p>
                   </a:txBody>
@@ -3727,7 +3727,7 @@
                         <a:rPr sz="900">
                           <a:latin typeface="Segoe UI"/>
                         </a:rPr>
-                        <a:t>Fleet Book %: 31.3%</a:t>
+                        <a:t>Fleet Book %: 29.3%</a:t>
                       </a:r>
                     </a:p>
                   </a:txBody>
@@ -3766,7 +3766,7 @@
                         <a:rPr sz="900">
                           <a:latin typeface="Segoe UI"/>
                         </a:rPr>
-                        <a:t>Non-Fleet Subs: 162  |  Binds: 9</a:t>
+                        <a:t>Non-Fleet Subs: 163  |  Binds: 10</a:t>
                       </a:r>
                     </a:p>
                   </a:txBody>
@@ -3803,7 +3803,7 @@
                         <a:rPr sz="900">
                           <a:latin typeface="Segoe UI"/>
                         </a:rPr>
-                        <a:t>Non-Fleet Bound Premium: $234,638.34</a:t>
+                        <a:t>Non-Fleet Bound Premium: $256,147.10</a:t>
                       </a:r>
                     </a:p>
                   </a:txBody>
@@ -3840,7 +3840,7 @@
                         <a:rPr sz="900">
                           <a:latin typeface="Segoe UI"/>
                         </a:rPr>
-                        <a:t>Non-Fleet Book %: 68.7%</a:t>
+                        <a:t>Non-Fleet Book %: 70.7%</a:t>
                       </a:r>
                     </a:p>
                   </a:txBody>
@@ -4428,7 +4428,7 @@
                           </a:solidFill>
                           <a:latin typeface="Segoe UI"/>
                         </a:rPr>
-                        <a:t>32</a:t>
+                        <a:t>34</a:t>
                       </a:r>
                     </a:p>
                   </a:txBody>
@@ -4664,7 +4664,7 @@
                         <a:rPr sz="800">
                           <a:latin typeface="Segoe UI"/>
                         </a:rPr>
-                        <a:t>33.3%</a:t>
+                        <a:t>29.6%</a:t>
                       </a:r>
                     </a:p>
                   </a:txBody>
@@ -4707,7 +4707,7 @@
                           </a:solidFill>
                           <a:latin typeface="Segoe UI"/>
                         </a:rPr>
-                        <a:t>3.1%</a:t>
+                        <a:t>5.9%</a:t>
                       </a:r>
                     </a:p>
                   </a:txBody>
@@ -4943,7 +4943,7 @@
                         <a:rPr sz="800">
                           <a:latin typeface="Segoe UI"/>
                         </a:rPr>
-                        <a:t>9</a:t>
+                        <a:t>8</a:t>
                       </a:r>
                     </a:p>
                   </a:txBody>
@@ -4983,7 +4983,7 @@
                           </a:solidFill>
                           <a:latin typeface="Segoe UI"/>
                         </a:rPr>
-                        <a:t>1</a:t>
+                        <a:t>2</a:t>
                       </a:r>
                     </a:p>
                   </a:txBody>
@@ -5255,11 +5255,11 @@
                       <a:r>
                         <a:rPr sz="800" b="1">
                           <a:solidFill>
-                            <a:srgbClr val="DC2626"/>
+                            <a:srgbClr val="059669"/>
                           </a:solidFill>
                           <a:latin typeface="Segoe UI"/>
                         </a:rPr>
-                        <a:t>$32.7K</a:t>
+                        <a:t>$53.1K</a:t>
                       </a:r>
                     </a:p>
                   </a:txBody>

--- a/generated/Tier 1 Broker Scorecards/Convoy Trucking Insurance Agency, Inc_Broker_Scorecard.pptx
+++ b/generated/Tier 1 Broker Scorecards/Convoy Trucking Insurance Agency, Inc_Broker_Scorecard.pptx
@@ -4428,7 +4428,7 @@
                           </a:solidFill>
                           <a:latin typeface="Segoe UI"/>
                         </a:rPr>
-                        <a:t>34</a:t>
+                        <a:t>35</a:t>
                       </a:r>
                     </a:p>
                   </a:txBody>
@@ -4664,7 +4664,7 @@
                         <a:rPr sz="800">
                           <a:latin typeface="Segoe UI"/>
                         </a:rPr>
-                        <a:t>29.6%</a:t>
+                        <a:t>33.3%</a:t>
                       </a:r>
                     </a:p>
                   </a:txBody>
@@ -4707,7 +4707,7 @@
                           </a:solidFill>
                           <a:latin typeface="Segoe UI"/>
                         </a:rPr>
-                        <a:t>5.9%</a:t>
+                        <a:t>5.7%</a:t>
                       </a:r>
                     </a:p>
                   </a:txBody>
@@ -4943,7 +4943,7 @@
                         <a:rPr sz="800">
                           <a:latin typeface="Segoe UI"/>
                         </a:rPr>
-                        <a:t>8</a:t>
+                        <a:t>9</a:t>
                       </a:r>
                     </a:p>
                   </a:txBody>

--- a/generated/Tier 1 Broker Scorecards/Convoy Trucking Insurance Agency, Inc_Broker_Scorecard.pptx
+++ b/generated/Tier 1 Broker Scorecards/Convoy Trucking Insurance Agency, Inc_Broker_Scorecard.pptx
@@ -3394,7 +3394,7 @@
                         <a:rPr sz="900">
                           <a:latin typeface="Segoe UI"/>
                         </a:rPr>
-                        <a:t>Tier 1  |  6.15% / 15.00%</a:t>
+                        <a:t>Tier 1  |  6.08% / 15.00%</a:t>
                       </a:r>
                     </a:p>
                   </a:txBody>
@@ -3653,7 +3653,7 @@
                         <a:rPr sz="900">
                           <a:latin typeface="Segoe UI"/>
                         </a:rPr>
-                        <a:t>Fleet Subs: 16  |  Binds: 1</a:t>
+                        <a:t>Fleet Subs: 17  |  Binds: 1</a:t>
                       </a:r>
                     </a:p>
                   </a:txBody>
@@ -3690,7 +3690,7 @@
                         <a:rPr sz="900">
                           <a:latin typeface="Segoe UI"/>
                         </a:rPr>
-                        <a:t>Fleet Bound Premium: $105,952.99</a:t>
+                        <a:t>Fleet Bound Premium: $107,768.10</a:t>
                       </a:r>
                     </a:p>
                   </a:txBody>
@@ -3727,7 +3727,7 @@
                         <a:rPr sz="900">
                           <a:latin typeface="Segoe UI"/>
                         </a:rPr>
-                        <a:t>Fleet Book %: 29.3%</a:t>
+                        <a:t>Fleet Book %: 29.8%</a:t>
                       </a:r>
                     </a:p>
                   </a:txBody>
@@ -3766,7 +3766,7 @@
                         <a:rPr sz="900">
                           <a:latin typeface="Segoe UI"/>
                         </a:rPr>
-                        <a:t>Non-Fleet Subs: 163  |  Binds: 10</a:t>
+                        <a:t>Non-Fleet Subs: 164  |  Binds: 10</a:t>
                       </a:r>
                     </a:p>
                   </a:txBody>
@@ -3803,7 +3803,7 @@
                         <a:rPr sz="900">
                           <a:latin typeface="Segoe UI"/>
                         </a:rPr>
-                        <a:t>Non-Fleet Bound Premium: $256,147.10</a:t>
+                        <a:t>Non-Fleet Bound Premium: $254,331.99</a:t>
                       </a:r>
                     </a:p>
                   </a:txBody>
@@ -3840,7 +3840,7 @@
                         <a:rPr sz="900">
                           <a:latin typeface="Segoe UI"/>
                         </a:rPr>
-                        <a:t>Non-Fleet Book %: 70.7%</a:t>
+                        <a:t>Non-Fleet Book %: 70.2%</a:t>
                       </a:r>
                     </a:p>
                   </a:txBody>
@@ -4428,7 +4428,7 @@
                           </a:solidFill>
                           <a:latin typeface="Segoe UI"/>
                         </a:rPr>
-                        <a:t>35</a:t>
+                        <a:t>38</a:t>
                       </a:r>
                     </a:p>
                   </a:txBody>
@@ -4707,7 +4707,7 @@
                           </a:solidFill>
                           <a:latin typeface="Segoe UI"/>
                         </a:rPr>
-                        <a:t>5.7%</a:t>
+                        <a:t>5.3%</a:t>
                       </a:r>
                     </a:p>
                   </a:txBody>

--- a/generated/Tier 1 Broker Scorecards/Convoy Trucking Insurance Agency, Inc_Broker_Scorecard.pptx
+++ b/generated/Tier 1 Broker Scorecards/Convoy Trucking Insurance Agency, Inc_Broker_Scorecard.pptx
@@ -3357,7 +3357,7 @@
                         <a:rPr sz="800">
                           <a:latin typeface="Segoe UI"/>
                         </a:rPr>
-                        <a:t>$713,272.16 / $896,597.16 / $362,100.09</a:t>
+                        <a:t>$713,272.16 / $896,656.62 / $362,159.55</a:t>
                       </a:r>
                     </a:p>
                   </a:txBody>
@@ -3653,7 +3653,7 @@
                         <a:rPr sz="900">
                           <a:latin typeface="Segoe UI"/>
                         </a:rPr>
-                        <a:t>Fleet Subs: 17  |  Binds: 1</a:t>
+                        <a:t>Fleet Subs: 17  |  Binds: 0</a:t>
                       </a:r>
                     </a:p>
                   </a:txBody>
@@ -3690,7 +3690,7 @@
                         <a:rPr sz="900">
                           <a:latin typeface="Segoe UI"/>
                         </a:rPr>
-                        <a:t>Fleet Bound Premium: $107,768.10</a:t>
+                        <a:t>Fleet Bound Premium: $0.00</a:t>
                       </a:r>
                     </a:p>
                   </a:txBody>
@@ -3727,7 +3727,7 @@
                         <a:rPr sz="900">
                           <a:latin typeface="Segoe UI"/>
                         </a:rPr>
-                        <a:t>Fleet Book %: 29.8%</a:t>
+                        <a:t>Fleet Book %: 0.0%</a:t>
                       </a:r>
                     </a:p>
                   </a:txBody>
@@ -3766,7 +3766,7 @@
                         <a:rPr sz="900">
                           <a:latin typeface="Segoe UI"/>
                         </a:rPr>
-                        <a:t>Non-Fleet Subs: 164  |  Binds: 10</a:t>
+                        <a:t>Non-Fleet Subs: 164  |  Binds: 11</a:t>
                       </a:r>
                     </a:p>
                   </a:txBody>
@@ -3803,7 +3803,7 @@
                         <a:rPr sz="900">
                           <a:latin typeface="Segoe UI"/>
                         </a:rPr>
-                        <a:t>Non-Fleet Bound Premium: $254,331.99</a:t>
+                        <a:t>Non-Fleet Bound Premium: $362,159.55</a:t>
                       </a:r>
                     </a:p>
                   </a:txBody>
@@ -3840,7 +3840,7 @@
                         <a:rPr sz="900">
                           <a:latin typeface="Segoe UI"/>
                         </a:rPr>
-                        <a:t>Non-Fleet Book %: 70.2%</a:t>
+                        <a:t>Non-Fleet Book %: 100.0%</a:t>
                       </a:r>
                     </a:p>
                   </a:txBody>
@@ -4664,7 +4664,7 @@
                         <a:rPr sz="800">
                           <a:latin typeface="Segoe UI"/>
                         </a:rPr>
-                        <a:t>33.3%</a:t>
+                        <a:t>29.6%</a:t>
                       </a:r>
                     </a:p>
                   </a:txBody>
@@ -4707,7 +4707,7 @@
                           </a:solidFill>
                           <a:latin typeface="Segoe UI"/>
                         </a:rPr>
-                        <a:t>5.3%</a:t>
+                        <a:t>7.9%</a:t>
                       </a:r>
                     </a:p>
                   </a:txBody>
@@ -4943,7 +4943,7 @@
                         <a:rPr sz="800">
                           <a:latin typeface="Segoe UI"/>
                         </a:rPr>
-                        <a:t>9</a:t>
+                        <a:t>8</a:t>
                       </a:r>
                     </a:p>
                   </a:txBody>
@@ -4983,7 +4983,7 @@
                           </a:solidFill>
                           <a:latin typeface="Segoe UI"/>
                         </a:rPr>
-                        <a:t>2</a:t>
+                        <a:t>3</a:t>
                       </a:r>
                     </a:p>
                   </a:txBody>
@@ -5259,7 +5259,7 @@
                           </a:solidFill>
                           <a:latin typeface="Segoe UI"/>
                         </a:rPr>
-                        <a:t>$53.1K</a:t>
+                        <a:t>$53.2K</a:t>
                       </a:r>
                     </a:p>
                   </a:txBody>

--- a/generated/Tier 1 Broker Scorecards/Convoy Trucking Insurance Agency, Inc_Broker_Scorecard.pptx
+++ b/generated/Tier 1 Broker Scorecards/Convoy Trucking Insurance Agency, Inc_Broker_Scorecard.pptx
@@ -3357,7 +3357,7 @@
                         <a:rPr sz="800">
                           <a:latin typeface="Segoe UI"/>
                         </a:rPr>
-                        <a:t>$713,272.16 / $896,656.62 / $362,159.55</a:t>
+                        <a:t>$713,272.16 / $937,122.90 / $402,625.83</a:t>
                       </a:r>
                     </a:p>
                   </a:txBody>
@@ -3394,7 +3394,7 @@
                         <a:rPr sz="900">
                           <a:latin typeface="Segoe UI"/>
                         </a:rPr>
-                        <a:t>Tier 1  |  6.08% / 15.00%</a:t>
+                        <a:t>Tier 1  |  6.04% / 15.00%</a:t>
                       </a:r>
                     </a:p>
                   </a:txBody>
@@ -3431,7 +3431,7 @@
                         <a:rPr sz="900">
                           <a:latin typeface="Segoe UI"/>
                         </a:rPr>
-                        <a:t>$998,581.02  (36.3% achieved)</a:t>
+                        <a:t>$998,581.02  (40.3% achieved)</a:t>
                       </a:r>
                     </a:p>
                   </a:txBody>
@@ -3766,7 +3766,7 @@
                         <a:rPr sz="900">
                           <a:latin typeface="Segoe UI"/>
                         </a:rPr>
-                        <a:t>Non-Fleet Subs: 164  |  Binds: 11</a:t>
+                        <a:t>Non-Fleet Subs: 165  |  Binds: 11</a:t>
                       </a:r>
                     </a:p>
                   </a:txBody>
@@ -3803,7 +3803,7 @@
                         <a:rPr sz="900">
                           <a:latin typeface="Segoe UI"/>
                         </a:rPr>
-                        <a:t>Non-Fleet Bound Premium: $362,159.55</a:t>
+                        <a:t>Non-Fleet Bound Premium: $402,625.83</a:t>
                       </a:r>
                     </a:p>
                   </a:txBody>
@@ -4428,7 +4428,7 @@
                           </a:solidFill>
                           <a:latin typeface="Segoe UI"/>
                         </a:rPr>
-                        <a:t>38</a:t>
+                        <a:t>39</a:t>
                       </a:r>
                     </a:p>
                   </a:txBody>
@@ -4707,7 +4707,7 @@
                           </a:solidFill>
                           <a:latin typeface="Segoe UI"/>
                         </a:rPr>
-                        <a:t>7.9%</a:t>
+                        <a:t>7.7%</a:t>
                       </a:r>
                     </a:p>
                   </a:txBody>
@@ -5259,7 +5259,7 @@
                           </a:solidFill>
                           <a:latin typeface="Segoe UI"/>
                         </a:rPr>
-                        <a:t>$53.2K</a:t>
+                        <a:t>$93.6K</a:t>
                       </a:r>
                     </a:p>
                   </a:txBody>

--- a/generated/Tier 1 Broker Scorecards/Convoy Trucking Insurance Agency, Inc_Broker_Scorecard.pptx
+++ b/generated/Tier 1 Broker Scorecards/Convoy Trucking Insurance Agency, Inc_Broker_Scorecard.pptx
@@ -3357,7 +3357,7 @@
                         <a:rPr sz="800">
                           <a:latin typeface="Segoe UI"/>
                         </a:rPr>
-                        <a:t>$713,272.16 / $937,122.90 / $402,625.83</a:t>
+                        <a:t>$713,272.16 / $898,816.53 / $402,625.83</a:t>
                       </a:r>
                     </a:p>
                   </a:txBody>
@@ -4664,7 +4664,7 @@
                         <a:rPr sz="800">
                           <a:latin typeface="Segoe UI"/>
                         </a:rPr>
-                        <a:t>33.3%</a:t>
+                        <a:t>29.6%</a:t>
                       </a:r>
                     </a:p>
                   </a:txBody>
@@ -4943,7 +4943,7 @@
                         <a:rPr sz="800">
                           <a:latin typeface="Segoe UI"/>
                         </a:rPr>
-                        <a:t>9</a:t>
+                        <a:t>8</a:t>
                       </a:r>
                     </a:p>
                   </a:txBody>
